--- a/examples/pro.pptx
+++ b/examples/pro.pptx
@@ -14,6 +14,7 @@
     <p:sldId id="262" r:id="rId13"/>
     <p:sldId id="263" r:id="rId14"/>
     <p:sldId id="264" r:id="rId15"/>
+    <p:sldId id="265" r:id="rId16"/>
   </p:sldIdLst>
   <p:sldSz cx="12192000" cy="6858000" type="screen4x3"/>
   <p:notesSz cx="6858000" cy="9144000"/>
@@ -3785,7 +3786,7 @@
         <p:spPr>
           <a:xfrm>
             <a:off x="8232725" y="4733925"/>
-            <a:ext cx="866775" cy="276225"/>
+            <a:ext cx="619125" cy="276225"/>
           </a:xfrm>
           <a:prstGeom prst="roundRect">
             <a:avLst>
@@ -3830,8 +3831,8 @@
         </p:nvSpPr>
         <p:spPr>
           <a:xfrm>
-            <a:off x="9175700" y="4733925"/>
-            <a:ext cx="619125" cy="276225"/>
+            <a:off x="8928050" y="4733925"/>
+            <a:ext cx="866775" cy="276225"/>
           </a:xfrm>
           <a:prstGeom prst="roundRect">
             <a:avLst>
@@ -3877,7 +3878,7 @@
         <p:spPr>
           <a:xfrm>
             <a:off x="9871025" y="4733925"/>
-            <a:ext cx="742950" cy="276225"/>
+            <a:ext cx="619125" cy="276225"/>
           </a:xfrm>
           <a:prstGeom prst="roundRect">
             <a:avLst>
@@ -3923,7 +3924,7 @@
         <p:spPr>
           <a:xfrm>
             <a:off x="8232725" y="5086350"/>
-            <a:ext cx="495300" cy="276225"/>
+            <a:ext cx="742950" cy="276225"/>
           </a:xfrm>
           <a:prstGeom prst="roundRect">
             <a:avLst>
@@ -3960,9 +3961,55 @@
           <a:p/>
         </p:txBody>
       </p:sp>
+      <p:sp>
+        <p:nvSpPr>
+          <p:cNvPr id="21" name="Rounded Rectangle 20"/>
+          <p:cNvSpPr/>
+          <p:nvPr/>
+        </p:nvSpPr>
+        <p:spPr>
+          <a:xfrm>
+            <a:off x="9051875" y="5086350"/>
+            <a:ext cx="495300" cy="276225"/>
+          </a:xfrm>
+          <a:prstGeom prst="roundRect">
+            <a:avLst>
+              <a:gd name="adj" fmla="val 50000"/>
+            </a:avLst>
+          </a:prstGeom>
+          <a:noFill/>
+          <a:ln w="9525">
+            <a:solidFill>
+              <a:srgbClr val="1E2F4D">
+                <a:alpha val="35000"/>
+              </a:srgbClr>
+            </a:solidFill>
+          </a:ln>
+          <a:effectLst/>
+        </p:spPr>
+        <p:style>
+          <a:lnRef idx="1">
+            <a:schemeClr val="accent1"/>
+          </a:lnRef>
+          <a:fillRef idx="3">
+            <a:schemeClr val="accent1"/>
+          </a:fillRef>
+          <a:effectRef idx="2">
+            <a:schemeClr val="accent1"/>
+          </a:effectRef>
+          <a:fontRef idx="minor">
+            <a:schemeClr val="lt1"/>
+          </a:fontRef>
+        </p:style>
+        <p:txBody>
+          <a:bodyPr rtlCol="0" anchor="ctr"/>
+          <a:lstStyle/>
+          <a:p/>
+        </p:txBody>
+      </p:sp>
       <p:pic>
         <p:nvPicPr>
-          <p:cNvPr id="21" name="Picture 20" descr="icon-compass-4b4dc61cbf.png"/>
+          <p:cNvPr id="22" name="Picture 21" descr="icon-compass-4b4dc61cbf.png"/>
           <p:cNvPicPr>
             <a:picLocks noChangeAspect="1"/>
           </p:cNvPicPr>
@@ -3986,7 +4033,7 @@
       </p:pic>
       <p:pic>
         <p:nvPicPr>
-          <p:cNvPr id="22" name="Picture 21" descr="icon-users-811ef0bcec.png"/>
+          <p:cNvPr id="23" name="Picture 22" descr="icon-users-811ef0bcec.png"/>
           <p:cNvPicPr>
             <a:picLocks noChangeAspect="1"/>
           </p:cNvPicPr>
@@ -4010,7 +4057,7 @@
       </p:pic>
       <p:pic>
         <p:nvPicPr>
-          <p:cNvPr id="23" name="Picture 22" descr="icon-target-2653743cf4.png"/>
+          <p:cNvPr id="24" name="Picture 23" descr="icon-target-2653743cf4.png"/>
           <p:cNvPicPr>
             <a:picLocks noChangeAspect="1"/>
           </p:cNvPicPr>
@@ -4034,7 +4081,7 @@
       </p:pic>
       <p:pic>
         <p:nvPicPr>
-          <p:cNvPr id="24" name="Picture 23" descr="icon-compass-4b4dc61cbf.png"/>
+          <p:cNvPr id="25" name="Picture 24" descr="icon-compass-4b4dc61cbf.png"/>
           <p:cNvPicPr>
             <a:picLocks noChangeAspect="1"/>
           </p:cNvPicPr>
@@ -4058,7 +4105,7 @@
       </p:pic>
       <p:sp>
         <p:nvSpPr>
-          <p:cNvPr id="25" name="TextBox 24"/>
+          <p:cNvPr id="26" name="TextBox 25"/>
           <p:cNvSpPr txBox="1"/>
           <p:nvPr/>
         </p:nvSpPr>
@@ -4098,7 +4145,7 @@
       </p:sp>
       <p:sp>
         <p:nvSpPr>
-          <p:cNvPr id="26" name="TextBox 25"/>
+          <p:cNvPr id="27" name="TextBox 26"/>
           <p:cNvSpPr txBox="1"/>
           <p:nvPr/>
         </p:nvSpPr>
@@ -4138,7 +4185,7 @@
       </p:sp>
       <p:sp>
         <p:nvSpPr>
-          <p:cNvPr id="27" name="TextBox 26"/>
+          <p:cNvPr id="28" name="TextBox 27"/>
           <p:cNvSpPr txBox="1"/>
           <p:nvPr/>
         </p:nvSpPr>
@@ -4178,7 +4225,7 @@
       </p:sp>
       <p:sp>
         <p:nvSpPr>
-          <p:cNvPr id="28" name="TextBox 27"/>
+          <p:cNvPr id="29" name="TextBox 28"/>
           <p:cNvSpPr txBox="1"/>
           <p:nvPr/>
         </p:nvSpPr>
@@ -4220,7 +4267,7 @@
       </p:sp>
       <p:sp>
         <p:nvSpPr>
-          <p:cNvPr id="29" name="TextBox 28"/>
+          <p:cNvPr id="30" name="TextBox 29"/>
           <p:cNvSpPr txBox="1"/>
           <p:nvPr/>
         </p:nvSpPr>
@@ -4262,7 +4309,7 @@
       </p:sp>
       <p:sp>
         <p:nvSpPr>
-          <p:cNvPr id="30" name="TextBox 29"/>
+          <p:cNvPr id="31" name="TextBox 30"/>
           <p:cNvSpPr txBox="1"/>
           <p:nvPr/>
         </p:nvSpPr>
@@ -4304,7 +4351,7 @@
       </p:sp>
       <p:sp>
         <p:nvSpPr>
-          <p:cNvPr id="31" name="TextBox 30"/>
+          <p:cNvPr id="32" name="TextBox 31"/>
           <p:cNvSpPr txBox="1"/>
           <p:nvPr/>
         </p:nvSpPr>
@@ -4346,7 +4393,7 @@
       </p:sp>
       <p:sp>
         <p:nvSpPr>
-          <p:cNvPr id="32" name="TextBox 31"/>
+          <p:cNvPr id="33" name="TextBox 32"/>
           <p:cNvSpPr txBox="1"/>
           <p:nvPr/>
         </p:nvSpPr>
@@ -4388,7 +4435,7 @@
       </p:sp>
       <p:sp>
         <p:nvSpPr>
-          <p:cNvPr id="33" name="TextBox 32"/>
+          <p:cNvPr id="34" name="TextBox 33"/>
           <p:cNvSpPr txBox="1"/>
           <p:nvPr/>
         </p:nvSpPr>
@@ -4428,7 +4475,7 @@
       </p:sp>
       <p:sp>
         <p:nvSpPr>
-          <p:cNvPr id="34" name="TextBox 33"/>
+          <p:cNvPr id="35" name="TextBox 34"/>
           <p:cNvSpPr txBox="1"/>
           <p:nvPr/>
         </p:nvSpPr>
@@ -4468,7 +4515,7 @@
       </p:sp>
       <p:sp>
         <p:nvSpPr>
-          <p:cNvPr id="35" name="TextBox 34"/>
+          <p:cNvPr id="36" name="TextBox 35"/>
           <p:cNvSpPr txBox="1"/>
           <p:nvPr/>
         </p:nvSpPr>
@@ -4508,7 +4555,7 @@
       </p:sp>
       <p:sp>
         <p:nvSpPr>
-          <p:cNvPr id="36" name="TextBox 35"/>
+          <p:cNvPr id="37" name="TextBox 36"/>
           <p:cNvSpPr txBox="1"/>
           <p:nvPr/>
         </p:nvSpPr>
@@ -4548,7 +4595,7 @@
       </p:sp>
       <p:sp>
         <p:nvSpPr>
-          <p:cNvPr id="37" name="TextBox 36"/>
+          <p:cNvPr id="38" name="TextBox 37"/>
           <p:cNvSpPr txBox="1"/>
           <p:nvPr/>
         </p:nvSpPr>
@@ -4588,7 +4635,7 @@
       </p:sp>
       <p:sp>
         <p:nvSpPr>
-          <p:cNvPr id="38" name="TextBox 37"/>
+          <p:cNvPr id="39" name="TextBox 38"/>
           <p:cNvSpPr txBox="1"/>
           <p:nvPr/>
         </p:nvSpPr>
@@ -4628,7 +4675,7 @@
       </p:sp>
       <p:sp>
         <p:nvSpPr>
-          <p:cNvPr id="39" name="TextBox 38"/>
+          <p:cNvPr id="40" name="TextBox 39"/>
           <p:cNvSpPr txBox="1"/>
           <p:nvPr/>
         </p:nvSpPr>
@@ -4668,7 +4715,7 @@
       </p:sp>
       <p:sp>
         <p:nvSpPr>
-          <p:cNvPr id="40" name="TextBox 39"/>
+          <p:cNvPr id="41" name="TextBox 40"/>
           <p:cNvSpPr txBox="1"/>
           <p:nvPr/>
         </p:nvSpPr>
@@ -4708,7 +4755,7 @@
       </p:sp>
       <p:sp>
         <p:nvSpPr>
-          <p:cNvPr id="41" name="TextBox 40"/>
+          <p:cNvPr id="42" name="TextBox 41"/>
           <p:cNvSpPr txBox="1"/>
           <p:nvPr/>
         </p:nvSpPr>
@@ -4748,7 +4795,7 @@
       </p:sp>
       <p:sp>
         <p:nvSpPr>
-          <p:cNvPr id="42" name="TextBox 41"/>
+          <p:cNvPr id="43" name="TextBox 42"/>
           <p:cNvSpPr txBox="1"/>
           <p:nvPr/>
         </p:nvSpPr>
@@ -4788,7 +4835,7 @@
       </p:sp>
       <p:sp>
         <p:nvSpPr>
-          <p:cNvPr id="43" name="TextBox 42"/>
+          <p:cNvPr id="44" name="TextBox 43"/>
           <p:cNvSpPr txBox="1"/>
           <p:nvPr/>
         </p:nvSpPr>
@@ -4823,14 +4870,14 @@
                 <a:latin typeface="Noto Sans TC"/>
                 <a:ea typeface="Noto Sans TC"/>
               </a:rPr>
-              <a:t>留白適中（頁邊 88px）· 每頁 ≤70 字</a:t>
-            </a:r>
-          </a:p>
-        </p:txBody>
-      </p:sp>
-      <p:sp>
-        <p:nvSpPr>
-          <p:cNvPr id="44" name="TextBox 43"/>
+              <a:t>留白適中（頁邊 88px）· 字級不縮，裝不下就拆頁</a:t>
+            </a:r>
+          </a:p>
+        </p:txBody>
+      </p:sp>
+      <p:sp>
+        <p:nvSpPr>
+          <p:cNvPr id="45" name="TextBox 44"/>
           <p:cNvSpPr txBox="1"/>
           <p:nvPr/>
         </p:nvSpPr>
@@ -4870,7 +4917,7 @@
       </p:sp>
       <p:sp>
         <p:nvSpPr>
-          <p:cNvPr id="45" name="TextBox 44"/>
+          <p:cNvPr id="46" name="TextBox 45"/>
           <p:cNvSpPr txBox="1"/>
           <p:nvPr/>
         </p:nvSpPr>
@@ -4910,7 +4957,7 @@
       </p:sp>
       <p:sp>
         <p:nvSpPr>
-          <p:cNvPr id="46" name="TextBox 45"/>
+          <p:cNvPr id="47" name="TextBox 46"/>
           <p:cNvSpPr txBox="1"/>
           <p:nvPr/>
         </p:nvSpPr>
@@ -4950,7 +4997,7 @@
       </p:sp>
       <p:sp>
         <p:nvSpPr>
-          <p:cNvPr id="47" name="TextBox 46"/>
+          <p:cNvPr id="48" name="TextBox 47"/>
           <p:cNvSpPr txBox="1"/>
           <p:nvPr/>
         </p:nvSpPr>
@@ -4990,7 +5037,7 @@
       </p:sp>
       <p:sp>
         <p:nvSpPr>
-          <p:cNvPr id="48" name="TextBox 47"/>
+          <p:cNvPr id="49" name="TextBox 48"/>
           <p:cNvSpPr txBox="1"/>
           <p:nvPr/>
         </p:nvSpPr>
@@ -5030,14 +5077,14 @@
       </p:sp>
       <p:sp>
         <p:nvSpPr>
-          <p:cNvPr id="49" name="TextBox 48"/>
+          <p:cNvPr id="50" name="TextBox 49"/>
           <p:cNvSpPr txBox="1"/>
           <p:nvPr/>
         </p:nvSpPr>
         <p:spPr>
           <a:xfrm>
             <a:off x="8232725" y="4733925"/>
-            <a:ext cx="923925" cy="314325"/>
+            <a:ext cx="676275" cy="314325"/>
           </a:xfrm>
           <a:prstGeom prst="rect">
             <a:avLst/>
@@ -5063,21 +5110,21 @@
                 <a:latin typeface="Noto Sans TC"/>
                 <a:ea typeface="Noto Sans TC"/>
               </a:rPr>
-              <a:t>一頁一數字</a:t>
-            </a:r>
-          </a:p>
-        </p:txBody>
-      </p:sp>
-      <p:sp>
-        <p:nvSpPr>
-          <p:cNvPr id="50" name="TextBox 49"/>
-          <p:cNvSpPr txBox="1"/>
-          <p:nvPr/>
-        </p:nvSpPr>
-        <p:spPr>
-          <a:xfrm>
-            <a:off x="9175700" y="4733925"/>
-            <a:ext cx="676275" cy="314325"/>
+              <a:t>長文頁</a:t>
+            </a:r>
+          </a:p>
+        </p:txBody>
+      </p:sp>
+      <p:sp>
+        <p:nvSpPr>
+          <p:cNvPr id="51" name="TextBox 50"/>
+          <p:cNvSpPr txBox="1"/>
+          <p:nvPr/>
+        </p:nvSpPr>
+        <p:spPr>
+          <a:xfrm>
+            <a:off x="8928050" y="4733925"/>
+            <a:ext cx="923925" cy="314325"/>
           </a:xfrm>
           <a:prstGeom prst="rect">
             <a:avLst/>
@@ -5103,21 +5150,21 @@
                 <a:latin typeface="Noto Sans TC"/>
                 <a:ea typeface="Noto Sans TC"/>
               </a:rPr>
-              <a:t>章節頁</a:t>
-            </a:r>
-          </a:p>
-        </p:txBody>
-      </p:sp>
-      <p:sp>
-        <p:nvSpPr>
-          <p:cNvPr id="51" name="TextBox 50"/>
+              <a:t>一頁一數字</a:t>
+            </a:r>
+          </a:p>
+        </p:txBody>
+      </p:sp>
+      <p:sp>
+        <p:nvSpPr>
+          <p:cNvPr id="52" name="TextBox 51"/>
           <p:cNvSpPr txBox="1"/>
           <p:nvPr/>
         </p:nvSpPr>
         <p:spPr>
           <a:xfrm>
             <a:off x="9871025" y="4733925"/>
-            <a:ext cx="800100" cy="314325"/>
+            <a:ext cx="676275" cy="314325"/>
           </a:xfrm>
           <a:prstGeom prst="rect">
             <a:avLst/>
@@ -5143,21 +5190,21 @@
                 <a:latin typeface="Noto Sans TC"/>
                 <a:ea typeface="Noto Sans TC"/>
               </a:rPr>
-              <a:t>步驟流程</a:t>
-            </a:r>
-          </a:p>
-        </p:txBody>
-      </p:sp>
-      <p:sp>
-        <p:nvSpPr>
-          <p:cNvPr id="52" name="TextBox 51"/>
+              <a:t>章節頁</a:t>
+            </a:r>
+          </a:p>
+        </p:txBody>
+      </p:sp>
+      <p:sp>
+        <p:nvSpPr>
+          <p:cNvPr id="53" name="TextBox 52"/>
           <p:cNvSpPr txBox="1"/>
           <p:nvPr/>
         </p:nvSpPr>
         <p:spPr>
           <a:xfrm>
             <a:off x="8232725" y="5086350"/>
-            <a:ext cx="552450" cy="314325"/>
+            <a:ext cx="800100" cy="314325"/>
           </a:xfrm>
           <a:prstGeom prst="rect">
             <a:avLst/>
@@ -5183,6 +5230,46 @@
                 <a:latin typeface="Noto Sans TC"/>
                 <a:ea typeface="Noto Sans TC"/>
               </a:rPr>
+              <a:t>步驟流程</a:t>
+            </a:r>
+          </a:p>
+        </p:txBody>
+      </p:sp>
+      <p:sp>
+        <p:nvSpPr>
+          <p:cNvPr id="54" name="TextBox 53"/>
+          <p:cNvSpPr txBox="1"/>
+          <p:nvPr/>
+        </p:nvSpPr>
+        <p:spPr>
+          <a:xfrm>
+            <a:off x="9051875" y="5086350"/>
+            <a:ext cx="552450" cy="314325"/>
+          </a:xfrm>
+          <a:prstGeom prst="rect">
+            <a:avLst/>
+          </a:prstGeom>
+          <a:noFill/>
+        </p:spPr>
+        <p:txBody>
+          <a:bodyPr wrap="square" lIns="0" rIns="0" tIns="0" bIns="0" anchor="t">
+            <a:spAutoFit/>
+          </a:bodyPr>
+          <a:lstStyle/>
+          <a:p>
+            <a:pPr algn="l">
+              <a:lnSpc>
+                <a:spcPts val="2175"/>
+              </a:lnSpc>
+            </a:pPr>
+            <a:r>
+              <a:rPr sz="975" b="0">
+                <a:solidFill>
+                  <a:srgbClr val="1E2F4D"/>
+                </a:solidFill>
+                <a:latin typeface="Noto Sans TC"/>
+                <a:ea typeface="Noto Sans TC"/>
+              </a:rPr>
               <a:t>封底</a:t>
             </a:r>
           </a:p>
@@ -5190,7 +5277,7 @@
       </p:sp>
       <p:sp>
         <p:nvSpPr>
-          <p:cNvPr id="53" name="TextBox 52"/>
+          <p:cNvPr id="55" name="TextBox 54"/>
           <p:cNvSpPr txBox="1"/>
           <p:nvPr/>
         </p:nvSpPr>
@@ -5224,6 +5311,208 @@
                 <a:ea typeface="Noto Sans TC"/>
               </a:rPr>
               <a:t>01</a:t>
+            </a:r>
+          </a:p>
+        </p:txBody>
+      </p:sp>
+    </p:spTree>
+  </p:cSld>
+  <p:clrMapOvr>
+    <a:masterClrMapping/>
+  </p:clrMapOvr>
+</p:sld>
+</file>
+
+<file path=ppt/slides/slide10.xml><?xml version="1.0" encoding="utf-8"?>
+<p:sld xmlns:a="http://schemas.openxmlformats.org/drawingml/2006/main" xmlns:p="http://schemas.openxmlformats.org/presentationml/2006/main" xmlns:r="http://schemas.openxmlformats.org/officeDocument/2006/relationships">
+  <p:cSld>
+    <p:spTree>
+      <p:nvGrpSpPr>
+        <p:cNvPr id="1" name=""/>
+        <p:cNvGrpSpPr/>
+        <p:nvPr/>
+      </p:nvGrpSpPr>
+      <p:grpSpPr/>
+      <p:pic>
+        <p:nvPicPr>
+          <p:cNvPr id="2" name="Picture 1" descr="pro-1-bake.jpg"/>
+          <p:cNvPicPr>
+            <a:picLocks noChangeAspect="1"/>
+          </p:cNvPicPr>
+          <p:nvPr/>
+        </p:nvPicPr>
+        <p:blipFill>
+          <a:blip r:embed="rId2"/>
+          <a:stretch>
+            <a:fillRect/>
+          </a:stretch>
+        </p:blipFill>
+        <p:spPr>
+          <a:xfrm>
+            <a:off x="0" y="0"/>
+            <a:ext cx="12192000" cy="6858000"/>
+          </a:xfrm>
+          <a:prstGeom prst="rect">
+            <a:avLst/>
+          </a:prstGeom>
+        </p:spPr>
+      </p:pic>
+      <p:sp>
+        <p:nvSpPr>
+          <p:cNvPr id="3" name="TextBox 2"/>
+          <p:cNvSpPr txBox="1"/>
+          <p:nvPr/>
+        </p:nvSpPr>
+        <p:spPr>
+          <a:xfrm>
+            <a:off x="10462170" y="457200"/>
+            <a:ext cx="948779" cy="285750"/>
+          </a:xfrm>
+          <a:prstGeom prst="rect">
+            <a:avLst/>
+          </a:prstGeom>
+          <a:noFill/>
+        </p:spPr>
+        <p:txBody>
+          <a:bodyPr wrap="square" lIns="0" rIns="0" tIns="0" bIns="0" anchor="t">
+            <a:spAutoFit/>
+          </a:bodyPr>
+          <a:lstStyle/>
+          <a:p>
+            <a:pPr algn="l">
+              <a:lnSpc>
+                <a:spcPts val="1950"/>
+              </a:lnSpc>
+            </a:pPr>
+            <a:r>
+              <a:rPr sz="1350" b="1" spc="405">
+                <a:solidFill>
+                  <a:srgbClr val="1E2F4D"/>
+                </a:solidFill>
+                <a:latin typeface="Noto Serif TC"/>
+                <a:ea typeface="Noto Serif TC"/>
+              </a:rPr>
+              <a:t>北辰顧問</a:t>
+            </a:r>
+          </a:p>
+        </p:txBody>
+      </p:sp>
+      <p:sp>
+        <p:nvSpPr>
+          <p:cNvPr id="4" name="TextBox 3"/>
+          <p:cNvSpPr txBox="1"/>
+          <p:nvPr/>
+        </p:nvSpPr>
+        <p:spPr>
+          <a:xfrm>
+            <a:off x="838200" y="2850802"/>
+            <a:ext cx="10572750" cy="533400"/>
+          </a:xfrm>
+          <a:prstGeom prst="rect">
+            <a:avLst/>
+          </a:prstGeom>
+          <a:noFill/>
+        </p:spPr>
+        <p:txBody>
+          <a:bodyPr wrap="square" lIns="0" rIns="0" tIns="0" bIns="0" anchor="t">
+            <a:spAutoFit/>
+          </a:bodyPr>
+          <a:lstStyle/>
+          <a:p>
+            <a:pPr algn="l">
+              <a:lnSpc>
+                <a:spcPts val="3900"/>
+              </a:lnSpc>
+            </a:pPr>
+            <a:r>
+              <a:rPr sz="3000" b="1">
+                <a:solidFill>
+                  <a:srgbClr val="1E2F4D"/>
+                </a:solidFill>
+                <a:latin typeface="Noto Serif TC"/>
+                <a:ea typeface="Noto Serif TC"/>
+              </a:rPr>
+              <a:t>先看數字，再談方向。</a:t>
+            </a:r>
+          </a:p>
+        </p:txBody>
+      </p:sp>
+      <p:sp>
+        <p:nvSpPr>
+          <p:cNvPr id="5" name="TextBox 4"/>
+          <p:cNvSpPr txBox="1"/>
+          <p:nvPr/>
+        </p:nvSpPr>
+        <p:spPr>
+          <a:xfrm>
+            <a:off x="838200" y="3650902"/>
+            <a:ext cx="10572750" cy="394245"/>
+          </a:xfrm>
+          <a:prstGeom prst="rect">
+            <a:avLst/>
+          </a:prstGeom>
+          <a:noFill/>
+        </p:spPr>
+        <p:txBody>
+          <a:bodyPr wrap="square" lIns="0" rIns="0" tIns="0" bIns="0" anchor="t">
+            <a:spAutoFit/>
+          </a:bodyPr>
+          <a:lstStyle/>
+          <a:p>
+            <a:pPr algn="l">
+              <a:lnSpc>
+                <a:spcPts val="2804"/>
+              </a:lnSpc>
+            </a:pPr>
+            <a:r>
+              <a:rPr sz="1650" b="0">
+                <a:solidFill>
+                  <a:srgbClr val="1E2F4D"/>
+                </a:solidFill>
+                <a:latin typeface="Noto Sans TC"/>
+                <a:ea typeface="Noto Sans TC"/>
+              </a:rPr>
+              <a:t>hello@polaris.example（示意，換成你的）</a:t>
+            </a:r>
+          </a:p>
+        </p:txBody>
+      </p:sp>
+      <p:sp>
+        <p:nvSpPr>
+          <p:cNvPr id="6" name="TextBox 5"/>
+          <p:cNvSpPr txBox="1"/>
+          <p:nvPr/>
+        </p:nvSpPr>
+        <p:spPr>
+          <a:xfrm>
+            <a:off x="11205567" y="6362700"/>
+            <a:ext cx="205382" cy="228600"/>
+          </a:xfrm>
+          <a:prstGeom prst="rect">
+            <a:avLst/>
+          </a:prstGeom>
+          <a:noFill/>
+        </p:spPr>
+        <p:txBody>
+          <a:bodyPr wrap="square" lIns="0" rIns="0" tIns="0" bIns="0" anchor="t">
+            <a:spAutoFit/>
+          </a:bodyPr>
+          <a:lstStyle/>
+          <a:p>
+            <a:pPr algn="l">
+              <a:lnSpc>
+                <a:spcPts val="1500"/>
+              </a:lnSpc>
+            </a:pPr>
+            <a:r>
+              <a:rPr sz="1050" b="0">
+                <a:solidFill>
+                  <a:srgbClr val="1E2F4D"/>
+                </a:solidFill>
+                <a:latin typeface="Noto Sans TC"/>
+                <a:ea typeface="Noto Sans TC"/>
+              </a:rPr>
+              <a:t>10</a:t>
             </a:r>
           </a:p>
         </p:txBody>
@@ -6503,6 +6792,46 @@
         </p:nvSpPr>
         <p:spPr>
           <a:xfrm>
+            <a:off x="838200" y="457200"/>
+            <a:ext cx="1625947" cy="200025"/>
+          </a:xfrm>
+          <a:prstGeom prst="rect">
+            <a:avLst/>
+          </a:prstGeom>
+          <a:noFill/>
+        </p:spPr>
+        <p:txBody>
+          <a:bodyPr wrap="square" lIns="0" rIns="0" tIns="0" bIns="0" anchor="t">
+            <a:spAutoFit/>
+          </a:bodyPr>
+          <a:lstStyle/>
+          <a:p>
+            <a:pPr algn="l">
+              <a:lnSpc>
+                <a:spcPts val="1275"/>
+              </a:lnSpc>
+            </a:pPr>
+            <a:r>
+              <a:rPr sz="900" b="0" spc="270">
+                <a:solidFill>
+                  <a:srgbClr val="1E2F4D"/>
+                </a:solidFill>
+                <a:latin typeface="Noto Sans TC"/>
+                <a:ea typeface="Noto Sans TC"/>
+              </a:rPr>
+              <a:t>POLARIS ADVISORY</a:t>
+            </a:r>
+          </a:p>
+        </p:txBody>
+      </p:sp>
+      <p:sp>
+        <p:nvSpPr>
+          <p:cNvPr id="5" name="TextBox 4"/>
+          <p:cNvSpPr txBox="1"/>
+          <p:nvPr/>
+        </p:nvSpPr>
+        <p:spPr>
+          <a:xfrm>
             <a:off x="10462170" y="457200"/>
             <a:ext cx="948779" cy="285750"/>
           </a:xfrm>
@@ -6537,7 +6866,7 @@
       </p:sp>
       <p:sp>
         <p:nvSpPr>
-          <p:cNvPr id="5" name="TextBox 4"/>
+          <p:cNvPr id="6" name="TextBox 5"/>
           <p:cNvSpPr txBox="1"/>
           <p:nvPr/>
         </p:nvSpPr>
@@ -6577,7 +6906,7 @@
       </p:sp>
       <p:sp>
         <p:nvSpPr>
-          <p:cNvPr id="6" name="TextBox 5"/>
+          <p:cNvPr id="7" name="TextBox 6"/>
           <p:cNvSpPr txBox="1"/>
           <p:nvPr/>
         </p:nvSpPr>
@@ -6617,7 +6946,7 @@
       </p:sp>
       <p:sp>
         <p:nvSpPr>
-          <p:cNvPr id="7" name="TextBox 6"/>
+          <p:cNvPr id="8" name="TextBox 7"/>
           <p:cNvSpPr txBox="1"/>
           <p:nvPr/>
         </p:nvSpPr>
@@ -6657,7 +6986,7 @@
       </p:sp>
       <p:sp>
         <p:nvSpPr>
-          <p:cNvPr id="8" name="TextBox 7"/>
+          <p:cNvPr id="9" name="TextBox 8"/>
           <p:cNvSpPr txBox="1"/>
           <p:nvPr/>
         </p:nvSpPr>
@@ -6697,7 +7026,7 @@
       </p:sp>
       <p:sp>
         <p:nvSpPr>
-          <p:cNvPr id="9" name="TextBox 8"/>
+          <p:cNvPr id="10" name="TextBox 9"/>
           <p:cNvSpPr txBox="1"/>
           <p:nvPr/>
         </p:nvSpPr>
@@ -6737,7 +7066,7 @@
       </p:sp>
       <p:sp>
         <p:nvSpPr>
-          <p:cNvPr id="10" name="TextBox 9"/>
+          <p:cNvPr id="11" name="TextBox 10"/>
           <p:cNvSpPr txBox="1"/>
           <p:nvPr/>
         </p:nvSpPr>
@@ -6825,6 +7154,46 @@
         </p:nvSpPr>
         <p:spPr>
           <a:xfrm>
+            <a:off x="838200" y="457200"/>
+            <a:ext cx="1625947" cy="200025"/>
+          </a:xfrm>
+          <a:prstGeom prst="rect">
+            <a:avLst/>
+          </a:prstGeom>
+          <a:noFill/>
+        </p:spPr>
+        <p:txBody>
+          <a:bodyPr wrap="square" lIns="0" rIns="0" tIns="0" bIns="0" anchor="t">
+            <a:spAutoFit/>
+          </a:bodyPr>
+          <a:lstStyle/>
+          <a:p>
+            <a:pPr algn="l">
+              <a:lnSpc>
+                <a:spcPts val="1275"/>
+              </a:lnSpc>
+            </a:pPr>
+            <a:r>
+              <a:rPr sz="900" b="0" spc="270">
+                <a:solidFill>
+                  <a:srgbClr val="1E2F4D"/>
+                </a:solidFill>
+                <a:latin typeface="Noto Sans TC"/>
+                <a:ea typeface="Noto Sans TC"/>
+              </a:rPr>
+              <a:t>POLARIS ADVISORY</a:t>
+            </a:r>
+          </a:p>
+        </p:txBody>
+      </p:sp>
+      <p:sp>
+        <p:nvSpPr>
+          <p:cNvPr id="4" name="TextBox 3"/>
+          <p:cNvSpPr txBox="1"/>
+          <p:nvPr/>
+        </p:nvSpPr>
+        <p:spPr>
+          <a:xfrm>
             <a:off x="10462170" y="457200"/>
             <a:ext cx="948779" cy="285750"/>
           </a:xfrm>
@@ -6859,54 +7228,54 @@
       </p:sp>
       <p:sp>
         <p:nvSpPr>
-          <p:cNvPr id="4" name="TextBox 3"/>
-          <p:cNvSpPr txBox="1"/>
-          <p:nvPr/>
-        </p:nvSpPr>
-        <p:spPr>
-          <a:xfrm>
-            <a:off x="838200" y="1956494"/>
-            <a:ext cx="10572750" cy="1943100"/>
-          </a:xfrm>
-          <a:prstGeom prst="rect">
-            <a:avLst/>
-          </a:prstGeom>
-          <a:noFill/>
-        </p:spPr>
-        <p:txBody>
-          <a:bodyPr wrap="square" lIns="0" rIns="0" tIns="0" bIns="0" anchor="t">
-            <a:spAutoFit/>
-          </a:bodyPr>
-          <a:lstStyle/>
-          <a:p>
-            <a:pPr algn="l">
-              <a:lnSpc>
-                <a:spcPts val="15000"/>
-              </a:lnSpc>
-            </a:pPr>
-            <a:r>
-              <a:rPr sz="15000" b="1">
-                <a:solidFill>
-                  <a:srgbClr val="C2703D"/>
+          <p:cNvPr id="5" name="TextBox 4"/>
+          <p:cNvSpPr txBox="1"/>
+          <p:nvPr/>
+        </p:nvSpPr>
+        <p:spPr>
+          <a:xfrm>
+            <a:off x="838200" y="838200"/>
+            <a:ext cx="10572750" cy="533400"/>
+          </a:xfrm>
+          <a:prstGeom prst="rect">
+            <a:avLst/>
+          </a:prstGeom>
+          <a:noFill/>
+        </p:spPr>
+        <p:txBody>
+          <a:bodyPr wrap="square" lIns="0" rIns="0" tIns="0" bIns="0" anchor="t">
+            <a:spAutoFit/>
+          </a:bodyPr>
+          <a:lstStyle/>
+          <a:p>
+            <a:pPr algn="l">
+              <a:lnSpc>
+                <a:spcPts val="3900"/>
+              </a:lnSpc>
+            </a:pPr>
+            <a:r>
+              <a:rPr sz="3000" b="1">
+                <a:solidFill>
+                  <a:srgbClr val="1E2F4D"/>
                 </a:solidFill>
                 <a:latin typeface="Noto Serif TC"/>
                 <a:ea typeface="Noto Serif TC"/>
               </a:rPr>
-              <a:t>38%</a:t>
-            </a:r>
-          </a:p>
-        </p:txBody>
-      </p:sp>
-      <p:sp>
-        <p:nvSpPr>
-          <p:cNvPr id="5" name="TextBox 4"/>
-          <p:cNvSpPr txBox="1"/>
-          <p:nvPr/>
-        </p:nvSpPr>
-        <p:spPr>
-          <a:xfrm>
-            <a:off x="838200" y="4090094"/>
-            <a:ext cx="6153150" cy="394245"/>
+              <a:t>內文多的時候</a:t>
+            </a:r>
+          </a:p>
+        </p:txBody>
+      </p:sp>
+      <p:sp>
+        <p:nvSpPr>
+          <p:cNvPr id="6" name="TextBox 5"/>
+          <p:cNvSpPr txBox="1"/>
+          <p:nvPr/>
+        </p:nvSpPr>
+        <p:spPr>
+          <a:xfrm>
+            <a:off x="838200" y="2109192"/>
+            <a:ext cx="9963150" cy="750391"/>
           </a:xfrm>
           <a:prstGeom prst="rect">
             <a:avLst/>
@@ -6932,56 +7301,134 @@
                 <a:latin typeface="Noto Sans TC"/>
                 <a:ea typeface="Noto Sans TC"/>
               </a:rPr>
-              <a:t>客戶留存率提升，導入新流程後的第一年。</a:t>
-            </a:r>
-          </a:p>
-        </p:txBody>
-      </p:sp>
-      <p:sp>
-        <p:nvSpPr>
-          <p:cNvPr id="6" name="TextBox 5"/>
-          <p:cNvSpPr txBox="1"/>
-          <p:nvPr/>
-        </p:nvSpPr>
-        <p:spPr>
-          <a:xfrm>
-            <a:off x="838200" y="4674840"/>
-            <a:ext cx="6153150" cy="264765"/>
-          </a:xfrm>
-          <a:prstGeom prst="rect">
-            <a:avLst/>
-          </a:prstGeom>
-          <a:noFill/>
-        </p:spPr>
-        <p:txBody>
-          <a:bodyPr wrap="square" lIns="0" rIns="0" tIns="0" bIns="0" anchor="t">
-            <a:spAutoFit/>
-          </a:bodyPr>
-          <a:lstStyle/>
-          <a:p>
-            <a:pPr algn="l">
-              <a:lnSpc>
-                <a:spcPts val="1785"/>
-              </a:lnSpc>
-            </a:pPr>
-            <a:r>
-              <a:rPr sz="1050" b="0">
-                <a:solidFill>
-                  <a:srgbClr val="1E2F4D">
-                    <a:alpha val="85000"/>
-                  </a:srgbClr>
+              <a:t>這一頁是假字，用來示範內文很多的時候版面長什麼樣。字級還是 22，行距照大腦的設定，段落一段接一段往下排，不因為字多就把字縮小，也不把留白吃掉。</a:t>
+            </a:r>
+          </a:p>
+        </p:txBody>
+      </p:sp>
+      <p:sp>
+        <p:nvSpPr>
+          <p:cNvPr id="7" name="TextBox 6"/>
+          <p:cNvSpPr txBox="1"/>
+          <p:nvPr/>
+        </p:nvSpPr>
+        <p:spPr>
+          <a:xfrm>
+            <a:off x="838200" y="2992933"/>
+            <a:ext cx="9963150" cy="750391"/>
+          </a:xfrm>
+          <a:prstGeom prst="rect">
+            <a:avLst/>
+          </a:prstGeom>
+          <a:noFill/>
+        </p:spPr>
+        <p:txBody>
+          <a:bodyPr wrap="square" lIns="0" rIns="0" tIns="0" bIns="0" anchor="t">
+            <a:spAutoFit/>
+          </a:bodyPr>
+          <a:lstStyle/>
+          <a:p>
+            <a:pPr algn="l">
+              <a:lnSpc>
+                <a:spcPts val="2804"/>
+              </a:lnSpc>
+            </a:pPr>
+            <a:r>
+              <a:rPr sz="1650" b="0">
+                <a:solidFill>
+                  <a:srgbClr val="1E2230"/>
                 </a:solidFill>
                 <a:latin typeface="Noto Sans TC"/>
                 <a:ea typeface="Noto Sans TC"/>
               </a:rPr>
-              <a:t>示意數字，換成你的。</a:t>
-            </a:r>
-          </a:p>
-        </p:txBody>
-      </p:sp>
-      <p:sp>
-        <p:nvSpPr>
-          <p:cNvPr id="7" name="TextBox 6"/>
+              <a:t>假字假字，這裡通常會放一段背景說明：為什麼要做這件事、之前試過什麼、現在卡在哪裡。寫的時候一段只講一個重點，讀的人才跟得上，講的人也不會念到一半迷路。</a:t>
+            </a:r>
+          </a:p>
+        </p:txBody>
+      </p:sp>
+      <p:sp>
+        <p:nvSpPr>
+          <p:cNvPr id="8" name="TextBox 7"/>
+          <p:cNvSpPr txBox="1"/>
+          <p:nvPr/>
+        </p:nvSpPr>
+        <p:spPr>
+          <a:xfrm>
+            <a:off x="838200" y="3876675"/>
+            <a:ext cx="9963150" cy="750391"/>
+          </a:xfrm>
+          <a:prstGeom prst="rect">
+            <a:avLst/>
+          </a:prstGeom>
+          <a:noFill/>
+        </p:spPr>
+        <p:txBody>
+          <a:bodyPr wrap="square" lIns="0" rIns="0" tIns="0" bIns="0" anchor="t">
+            <a:spAutoFit/>
+          </a:bodyPr>
+          <a:lstStyle/>
+          <a:p>
+            <a:pPr algn="l">
+              <a:lnSpc>
+                <a:spcPts val="2804"/>
+              </a:lnSpc>
+            </a:pPr>
+            <a:r>
+              <a:rPr sz="1650" b="0">
+                <a:solidFill>
+                  <a:srgbClr val="1E2230"/>
+                </a:solidFill>
+                <a:latin typeface="Noto Sans TC"/>
+                <a:ea typeface="Noto Sans TC"/>
+              </a:rPr>
+              <a:t>內文到這個量大概就是一頁的上限。再多就拆成兩頁，或改用三欄重點、步驟流程把重點並列；不要縮字硬塞，也不要把行距壓扁，那樣看起來就不像同一份簡報了。</a:t>
+            </a:r>
+          </a:p>
+        </p:txBody>
+      </p:sp>
+      <p:sp>
+        <p:nvSpPr>
+          <p:cNvPr id="9" name="TextBox 8"/>
+          <p:cNvSpPr txBox="1"/>
+          <p:nvPr/>
+        </p:nvSpPr>
+        <p:spPr>
+          <a:xfrm>
+            <a:off x="838200" y="4760416"/>
+            <a:ext cx="9963150" cy="750391"/>
+          </a:xfrm>
+          <a:prstGeom prst="rect">
+            <a:avLst/>
+          </a:prstGeom>
+          <a:noFill/>
+        </p:spPr>
+        <p:txBody>
+          <a:bodyPr wrap="square" lIns="0" rIns="0" tIns="0" bIns="0" anchor="t">
+            <a:spAutoFit/>
+          </a:bodyPr>
+          <a:lstStyle/>
+          <a:p>
+            <a:pPr algn="l">
+              <a:lnSpc>
+                <a:spcPts val="2804"/>
+              </a:lnSpc>
+            </a:pPr>
+            <a:r>
+              <a:rPr sz="1650" b="0">
+                <a:solidFill>
+                  <a:srgbClr val="1E2230"/>
+                </a:solidFill>
+                <a:latin typeface="Noto Sans TC"/>
+                <a:ea typeface="Noto Sans TC"/>
+              </a:rPr>
+              <a:t>最後一段留給補充：數字要有出處、名詞前後一致、日期用絕對值。這些寫在大腦的禁區裡，AI 排版時會照做，你交件前只要對一次就好。</a:t>
+            </a:r>
+          </a:p>
+        </p:txBody>
+      </p:sp>
+      <p:sp>
+        <p:nvSpPr>
+          <p:cNvPr id="10" name="TextBox 9"/>
           <p:cNvSpPr txBox="1"/>
           <p:nvPr/>
         </p:nvSpPr>
@@ -7039,7 +7486,7 @@
       <p:grpSpPr/>
       <p:pic>
         <p:nvPicPr>
-          <p:cNvPr id="2" name="Picture 1" descr="pro-3-bake.jpg"/>
+          <p:cNvPr id="2" name="Picture 1" descr="pro-1-bake.jpg"/>
           <p:cNvPicPr>
             <a:picLocks noChangeAspect="1"/>
           </p:cNvPicPr>
@@ -7131,7 +7578,7 @@
             <a:r>
               <a:rPr sz="1350" b="1" spc="405">
                 <a:solidFill>
-                  <a:srgbClr val="F4F1EA"/>
+                  <a:srgbClr val="1E2F4D"/>
                 </a:solidFill>
                 <a:latin typeface="Noto Serif TC"/>
                 <a:ea typeface="Noto Serif TC"/>
@@ -7149,36 +7596,34 @@
         </p:nvSpPr>
         <p:spPr>
           <a:xfrm>
-            <a:off x="838200" y="2472630"/>
-            <a:ext cx="10572750" cy="1181100"/>
-          </a:xfrm>
-          <a:prstGeom prst="rect">
-            <a:avLst/>
-          </a:prstGeom>
-          <a:noFill/>
-        </p:spPr>
-        <p:txBody>
-          <a:bodyPr wrap="square" lIns="0" rIns="0" tIns="0" bIns="0" anchor="t">
-            <a:spAutoFit/>
-          </a:bodyPr>
-          <a:lstStyle/>
-          <a:p>
-            <a:pPr algn="l">
-              <a:lnSpc>
-                <a:spcPts val="9000"/>
-              </a:lnSpc>
-            </a:pPr>
-            <a:r>
-              <a:rPr sz="9000" b="1">
-                <a:solidFill>
-                  <a:srgbClr val="F4F1EA">
-                    <a:alpha val="35000"/>
-                  </a:srgbClr>
+            <a:off x="838200" y="1956494"/>
+            <a:ext cx="10572750" cy="1943100"/>
+          </a:xfrm>
+          <a:prstGeom prst="rect">
+            <a:avLst/>
+          </a:prstGeom>
+          <a:noFill/>
+        </p:spPr>
+        <p:txBody>
+          <a:bodyPr wrap="square" lIns="0" rIns="0" tIns="0" bIns="0" anchor="t">
+            <a:spAutoFit/>
+          </a:bodyPr>
+          <a:lstStyle/>
+          <a:p>
+            <a:pPr algn="l">
+              <a:lnSpc>
+                <a:spcPts val="15000"/>
+              </a:lnSpc>
+            </a:pPr>
+            <a:r>
+              <a:rPr sz="15000" b="1">
+                <a:solidFill>
+                  <a:srgbClr val="C2703D"/>
                 </a:solidFill>
                 <a:latin typeface="Noto Serif TC"/>
                 <a:ea typeface="Noto Serif TC"/>
               </a:rPr>
-              <a:t>02</a:t>
+              <a:t>38%</a:t>
             </a:r>
           </a:p>
         </p:txBody>
@@ -7191,34 +7636,34 @@
         </p:nvSpPr>
         <p:spPr>
           <a:xfrm>
-            <a:off x="838200" y="3691830"/>
-            <a:ext cx="10572750" cy="731490"/>
-          </a:xfrm>
-          <a:prstGeom prst="rect">
-            <a:avLst/>
-          </a:prstGeom>
-          <a:noFill/>
-        </p:spPr>
-        <p:txBody>
-          <a:bodyPr wrap="square" lIns="0" rIns="0" tIns="0" bIns="0" anchor="t">
-            <a:spAutoFit/>
-          </a:bodyPr>
-          <a:lstStyle/>
-          <a:p>
-            <a:pPr algn="l">
-              <a:lnSpc>
-                <a:spcPts val="5459"/>
-              </a:lnSpc>
-            </a:pPr>
-            <a:r>
-              <a:rPr sz="4200" b="1">
-                <a:solidFill>
-                  <a:srgbClr val="F4F1EA"/>
-                </a:solidFill>
-                <a:latin typeface="Noto Serif TC"/>
-                <a:ea typeface="Noto Serif TC"/>
-              </a:rPr>
-              <a:t>行動</a:t>
+            <a:off x="838200" y="4090094"/>
+            <a:ext cx="6153150" cy="394245"/>
+          </a:xfrm>
+          <a:prstGeom prst="rect">
+            <a:avLst/>
+          </a:prstGeom>
+          <a:noFill/>
+        </p:spPr>
+        <p:txBody>
+          <a:bodyPr wrap="square" lIns="0" rIns="0" tIns="0" bIns="0" anchor="t">
+            <a:spAutoFit/>
+          </a:bodyPr>
+          <a:lstStyle/>
+          <a:p>
+            <a:pPr algn="l">
+              <a:lnSpc>
+                <a:spcPts val="2804"/>
+              </a:lnSpc>
+            </a:pPr>
+            <a:r>
+              <a:rPr sz="1650" b="0">
+                <a:solidFill>
+                  <a:srgbClr val="1E2230"/>
+                </a:solidFill>
+                <a:latin typeface="Noto Sans TC"/>
+                <a:ea typeface="Noto Sans TC"/>
+              </a:rPr>
+              <a:t>客戶留存率提升，導入新流程後的第一年。</a:t>
             </a:r>
           </a:p>
         </p:txBody>
@@ -7226,6 +7671,48 @@
       <p:sp>
         <p:nvSpPr>
           <p:cNvPr id="7" name="TextBox 6"/>
+          <p:cNvSpPr txBox="1"/>
+          <p:nvPr/>
+        </p:nvSpPr>
+        <p:spPr>
+          <a:xfrm>
+            <a:off x="838200" y="4674840"/>
+            <a:ext cx="6153150" cy="264765"/>
+          </a:xfrm>
+          <a:prstGeom prst="rect">
+            <a:avLst/>
+          </a:prstGeom>
+          <a:noFill/>
+        </p:spPr>
+        <p:txBody>
+          <a:bodyPr wrap="square" lIns="0" rIns="0" tIns="0" bIns="0" anchor="t">
+            <a:spAutoFit/>
+          </a:bodyPr>
+          <a:lstStyle/>
+          <a:p>
+            <a:pPr algn="l">
+              <a:lnSpc>
+                <a:spcPts val="1785"/>
+              </a:lnSpc>
+            </a:pPr>
+            <a:r>
+              <a:rPr sz="1050" b="0">
+                <a:solidFill>
+                  <a:srgbClr val="1E2F4D">
+                    <a:alpha val="85000"/>
+                  </a:srgbClr>
+                </a:solidFill>
+                <a:latin typeface="Noto Sans TC"/>
+                <a:ea typeface="Noto Sans TC"/>
+              </a:rPr>
+              <a:t>示意數字，換成你的。</a:t>
+            </a:r>
+          </a:p>
+        </p:txBody>
+      </p:sp>
+      <p:sp>
+        <p:nvSpPr>
+          <p:cNvPr id="8" name="TextBox 7"/>
           <p:cNvSpPr txBox="1"/>
           <p:nvPr/>
         </p:nvSpPr>
@@ -7253,7 +7740,7 @@
             <a:r>
               <a:rPr sz="1050" b="0">
                 <a:solidFill>
-                  <a:srgbClr val="F4F1EA"/>
+                  <a:srgbClr val="1E2F4D"/>
                 </a:solidFill>
                 <a:latin typeface="Noto Sans TC"/>
                 <a:ea typeface="Noto Sans TC"/>
@@ -7283,7 +7770,7 @@
       <p:grpSpPr/>
       <p:pic>
         <p:nvPicPr>
-          <p:cNvPr id="2" name="Picture 1" descr="pro-1-bake.jpg"/>
+          <p:cNvPr id="2" name="Picture 1" descr="pro-3-bake.jpg"/>
           <p:cNvPicPr>
             <a:picLocks noChangeAspect="1"/>
           </p:cNvPicPr>
@@ -7307,133 +7794,47 @@
       </p:pic>
       <p:sp>
         <p:nvSpPr>
-          <p:cNvPr id="3" name="Rectangle 2"/>
-          <p:cNvSpPr/>
-          <p:nvPr/>
-        </p:nvSpPr>
-        <p:spPr>
-          <a:xfrm>
-            <a:off x="838200" y="2744241"/>
-            <a:ext cx="3251150" cy="2093416"/>
-          </a:xfrm>
-          <a:prstGeom prst="rect">
-            <a:avLst/>
-          </a:prstGeom>
-          <a:noFill/>
-          <a:ln w="9525">
-            <a:solidFill>
-              <a:srgbClr val="C2703D"/>
-            </a:solidFill>
-          </a:ln>
-          <a:effectLst/>
-        </p:spPr>
-        <p:style>
-          <a:lnRef idx="1">
-            <a:schemeClr val="accent1"/>
-          </a:lnRef>
-          <a:fillRef idx="3">
-            <a:schemeClr val="accent1"/>
-          </a:fillRef>
-          <a:effectRef idx="2">
-            <a:schemeClr val="accent1"/>
-          </a:effectRef>
-          <a:fontRef idx="minor">
-            <a:schemeClr val="lt1"/>
-          </a:fontRef>
-        </p:style>
-        <p:txBody>
-          <a:bodyPr rtlCol="0" anchor="ctr"/>
-          <a:lstStyle/>
-          <a:p/>
-        </p:txBody>
-      </p:sp>
-      <p:sp>
-        <p:nvSpPr>
-          <p:cNvPr id="4" name="Rectangle 3"/>
-          <p:cNvSpPr/>
-          <p:nvPr/>
-        </p:nvSpPr>
-        <p:spPr>
-          <a:xfrm>
-            <a:off x="4470350" y="2744241"/>
-            <a:ext cx="3251150" cy="2093416"/>
-          </a:xfrm>
-          <a:prstGeom prst="rect">
-            <a:avLst/>
-          </a:prstGeom>
-          <a:noFill/>
-          <a:ln w="9525">
-            <a:solidFill>
-              <a:srgbClr val="C2703D"/>
-            </a:solidFill>
-          </a:ln>
-          <a:effectLst/>
-        </p:spPr>
-        <p:style>
-          <a:lnRef idx="1">
-            <a:schemeClr val="accent1"/>
-          </a:lnRef>
-          <a:fillRef idx="3">
-            <a:schemeClr val="accent1"/>
-          </a:fillRef>
-          <a:effectRef idx="2">
-            <a:schemeClr val="accent1"/>
-          </a:effectRef>
-          <a:fontRef idx="minor">
-            <a:schemeClr val="lt1"/>
-          </a:fontRef>
-        </p:style>
-        <p:txBody>
-          <a:bodyPr rtlCol="0" anchor="ctr"/>
-          <a:lstStyle/>
-          <a:p/>
-        </p:txBody>
-      </p:sp>
-      <p:sp>
-        <p:nvSpPr>
-          <p:cNvPr id="5" name="Rectangle 4"/>
-          <p:cNvSpPr/>
-          <p:nvPr/>
-        </p:nvSpPr>
-        <p:spPr>
-          <a:xfrm>
-            <a:off x="8102500" y="2744241"/>
-            <a:ext cx="3251299" cy="2093416"/>
-          </a:xfrm>
-          <a:prstGeom prst="rect">
-            <a:avLst/>
-          </a:prstGeom>
-          <a:noFill/>
-          <a:ln w="9525">
-            <a:solidFill>
-              <a:srgbClr val="C2703D"/>
-            </a:solidFill>
-          </a:ln>
-          <a:effectLst/>
-        </p:spPr>
-        <p:style>
-          <a:lnRef idx="1">
-            <a:schemeClr val="accent1"/>
-          </a:lnRef>
-          <a:fillRef idx="3">
-            <a:schemeClr val="accent1"/>
-          </a:fillRef>
-          <a:effectRef idx="2">
-            <a:schemeClr val="accent1"/>
-          </a:effectRef>
-          <a:fontRef idx="minor">
-            <a:schemeClr val="lt1"/>
-          </a:fontRef>
-        </p:style>
-        <p:txBody>
-          <a:bodyPr rtlCol="0" anchor="ctr"/>
-          <a:lstStyle/>
-          <a:p/>
-        </p:txBody>
-      </p:sp>
-      <p:sp>
-        <p:nvSpPr>
-          <p:cNvPr id="6" name="TextBox 5"/>
+          <p:cNvPr id="3" name="TextBox 2"/>
+          <p:cNvSpPr txBox="1"/>
+          <p:nvPr/>
+        </p:nvSpPr>
+        <p:spPr>
+          <a:xfrm>
+            <a:off x="838200" y="457200"/>
+            <a:ext cx="1625947" cy="200025"/>
+          </a:xfrm>
+          <a:prstGeom prst="rect">
+            <a:avLst/>
+          </a:prstGeom>
+          <a:noFill/>
+        </p:spPr>
+        <p:txBody>
+          <a:bodyPr wrap="square" lIns="0" rIns="0" tIns="0" bIns="0" anchor="t">
+            <a:spAutoFit/>
+          </a:bodyPr>
+          <a:lstStyle/>
+          <a:p>
+            <a:pPr algn="l">
+              <a:lnSpc>
+                <a:spcPts val="1275"/>
+              </a:lnSpc>
+            </a:pPr>
+            <a:r>
+              <a:rPr sz="900" b="0" spc="270">
+                <a:solidFill>
+                  <a:srgbClr val="1E2F4D"/>
+                </a:solidFill>
+                <a:latin typeface="Noto Sans TC"/>
+                <a:ea typeface="Noto Sans TC"/>
+              </a:rPr>
+              <a:t>POLARIS ADVISORY</a:t>
+            </a:r>
+          </a:p>
+        </p:txBody>
+      </p:sp>
+      <p:sp>
+        <p:nvSpPr>
+          <p:cNvPr id="4" name="TextBox 3"/>
           <p:cNvSpPr txBox="1"/>
           <p:nvPr/>
         </p:nvSpPr>
@@ -7461,7 +7862,7 @@
             <a:r>
               <a:rPr sz="1350" b="1" spc="405">
                 <a:solidFill>
-                  <a:srgbClr val="1E2F4D"/>
+                  <a:srgbClr val="F4F1EA"/>
                 </a:solidFill>
                 <a:latin typeface="Noto Serif TC"/>
                 <a:ea typeface="Noto Serif TC"/>
@@ -7473,407 +7874,89 @@
       </p:sp>
       <p:sp>
         <p:nvSpPr>
-          <p:cNvPr id="7" name="TextBox 6"/>
-          <p:cNvSpPr txBox="1"/>
-          <p:nvPr/>
-        </p:nvSpPr>
-        <p:spPr>
-          <a:xfrm>
-            <a:off x="838200" y="838200"/>
-            <a:ext cx="10572750" cy="533400"/>
-          </a:xfrm>
-          <a:prstGeom prst="rect">
-            <a:avLst/>
-          </a:prstGeom>
-          <a:noFill/>
-        </p:spPr>
-        <p:txBody>
-          <a:bodyPr wrap="square" lIns="0" rIns="0" tIns="0" bIns="0" anchor="t">
-            <a:spAutoFit/>
-          </a:bodyPr>
-          <a:lstStyle/>
-          <a:p>
-            <a:pPr algn="l">
-              <a:lnSpc>
-                <a:spcPts val="3900"/>
-              </a:lnSpc>
-            </a:pPr>
-            <a:r>
-              <a:rPr sz="3000" b="1">
-                <a:solidFill>
-                  <a:srgbClr val="1E2F4D"/>
+          <p:cNvPr id="5" name="TextBox 4"/>
+          <p:cNvSpPr txBox="1"/>
+          <p:nvPr/>
+        </p:nvSpPr>
+        <p:spPr>
+          <a:xfrm>
+            <a:off x="838200" y="2472630"/>
+            <a:ext cx="10572750" cy="1181100"/>
+          </a:xfrm>
+          <a:prstGeom prst="rect">
+            <a:avLst/>
+          </a:prstGeom>
+          <a:noFill/>
+        </p:spPr>
+        <p:txBody>
+          <a:bodyPr wrap="square" lIns="0" rIns="0" tIns="0" bIns="0" anchor="t">
+            <a:spAutoFit/>
+          </a:bodyPr>
+          <a:lstStyle/>
+          <a:p>
+            <a:pPr algn="l">
+              <a:lnSpc>
+                <a:spcPts val="9000"/>
+              </a:lnSpc>
+            </a:pPr>
+            <a:r>
+              <a:rPr sz="9000" b="1">
+                <a:solidFill>
+                  <a:srgbClr val="F4F1EA">
+                    <a:alpha val="35000"/>
+                  </a:srgbClr>
                 </a:solidFill>
                 <a:latin typeface="Noto Serif TC"/>
                 <a:ea typeface="Noto Serif TC"/>
               </a:rPr>
-              <a:t>三步開始</a:t>
-            </a:r>
-          </a:p>
-        </p:txBody>
-      </p:sp>
-      <p:sp>
-        <p:nvSpPr>
-          <p:cNvPr id="8" name="TextBox 7"/>
-          <p:cNvSpPr txBox="1"/>
-          <p:nvPr/>
-        </p:nvSpPr>
-        <p:spPr>
-          <a:xfrm>
-            <a:off x="1143000" y="2982366"/>
-            <a:ext cx="2698700" cy="419100"/>
-          </a:xfrm>
-          <a:prstGeom prst="rect">
-            <a:avLst/>
-          </a:prstGeom>
-          <a:noFill/>
-        </p:spPr>
-        <p:txBody>
-          <a:bodyPr wrap="square" lIns="0" rIns="0" tIns="0" bIns="0" anchor="t">
-            <a:spAutoFit/>
-          </a:bodyPr>
-          <a:lstStyle/>
-          <a:p>
-            <a:pPr algn="l">
-              <a:lnSpc>
-                <a:spcPts val="3000"/>
-              </a:lnSpc>
-            </a:pPr>
-            <a:r>
-              <a:rPr sz="3000" b="1">
-                <a:solidFill>
-                  <a:srgbClr val="C2703D"/>
+              <a:t>02</a:t>
+            </a:r>
+          </a:p>
+        </p:txBody>
+      </p:sp>
+      <p:sp>
+        <p:nvSpPr>
+          <p:cNvPr id="6" name="TextBox 5"/>
+          <p:cNvSpPr txBox="1"/>
+          <p:nvPr/>
+        </p:nvSpPr>
+        <p:spPr>
+          <a:xfrm>
+            <a:off x="838200" y="3691830"/>
+            <a:ext cx="10572750" cy="731490"/>
+          </a:xfrm>
+          <a:prstGeom prst="rect">
+            <a:avLst/>
+          </a:prstGeom>
+          <a:noFill/>
+        </p:spPr>
+        <p:txBody>
+          <a:bodyPr wrap="square" lIns="0" rIns="0" tIns="0" bIns="0" anchor="t">
+            <a:spAutoFit/>
+          </a:bodyPr>
+          <a:lstStyle/>
+          <a:p>
+            <a:pPr algn="l">
+              <a:lnSpc>
+                <a:spcPts val="5459"/>
+              </a:lnSpc>
+            </a:pPr>
+            <a:r>
+              <a:rPr sz="4200" b="1">
+                <a:solidFill>
+                  <a:srgbClr val="F4F1EA"/>
                 </a:solidFill>
                 <a:latin typeface="Noto Serif TC"/>
                 <a:ea typeface="Noto Serif TC"/>
               </a:rPr>
-              <a:t>01</a:t>
-            </a:r>
-          </a:p>
-        </p:txBody>
-      </p:sp>
-      <p:sp>
-        <p:nvSpPr>
-          <p:cNvPr id="9" name="TextBox 8"/>
-          <p:cNvSpPr txBox="1"/>
-          <p:nvPr/>
-        </p:nvSpPr>
-        <p:spPr>
-          <a:xfrm>
-            <a:off x="1143000" y="3496716"/>
-            <a:ext cx="2698700" cy="342900"/>
-          </a:xfrm>
-          <a:prstGeom prst="rect">
-            <a:avLst/>
-          </a:prstGeom>
-          <a:noFill/>
-        </p:spPr>
-        <p:txBody>
-          <a:bodyPr wrap="square" lIns="0" rIns="0" tIns="0" bIns="0" anchor="t">
-            <a:spAutoFit/>
-          </a:bodyPr>
-          <a:lstStyle/>
-          <a:p>
-            <a:pPr algn="l">
-              <a:lnSpc>
-                <a:spcPts val="2400"/>
-              </a:lnSpc>
-            </a:pPr>
-            <a:r>
-              <a:rPr sz="1650" b="0">
-                <a:solidFill>
-                  <a:srgbClr val="1E2F4D"/>
-                </a:solidFill>
-                <a:latin typeface="Noto Sans TC"/>
-                <a:ea typeface="Noto Sans TC"/>
-              </a:rPr>
-              <a:t>盤點</a:t>
-            </a:r>
-          </a:p>
-        </p:txBody>
-      </p:sp>
-      <p:sp>
-        <p:nvSpPr>
-          <p:cNvPr id="10" name="TextBox 9"/>
-          <p:cNvSpPr txBox="1"/>
-          <p:nvPr/>
-        </p:nvSpPr>
-        <p:spPr>
-          <a:xfrm>
-            <a:off x="1143000" y="3858666"/>
-            <a:ext cx="2698700" cy="750391"/>
-          </a:xfrm>
-          <a:prstGeom prst="rect">
-            <a:avLst/>
-          </a:prstGeom>
-          <a:noFill/>
-        </p:spPr>
-        <p:txBody>
-          <a:bodyPr wrap="square" lIns="0" rIns="0" tIns="0" bIns="0" anchor="t">
-            <a:spAutoFit/>
-          </a:bodyPr>
-          <a:lstStyle/>
-          <a:p>
-            <a:pPr algn="l">
-              <a:lnSpc>
-                <a:spcPts val="2804"/>
-              </a:lnSpc>
-            </a:pPr>
-            <a:r>
-              <a:rPr sz="1650" b="0">
-                <a:solidFill>
-                  <a:srgbClr val="1E2230"/>
-                </a:solidFill>
-                <a:latin typeface="Noto Sans TC"/>
-                <a:ea typeface="Noto Sans TC"/>
-              </a:rPr>
-              <a:t>四週，盤三條產品線的毛利與流失。</a:t>
-            </a:r>
-          </a:p>
-        </p:txBody>
-      </p:sp>
-      <p:sp>
-        <p:nvSpPr>
-          <p:cNvPr id="11" name="TextBox 10"/>
-          <p:cNvSpPr txBox="1"/>
-          <p:nvPr/>
-        </p:nvSpPr>
-        <p:spPr>
-          <a:xfrm>
-            <a:off x="4775150" y="2982366"/>
-            <a:ext cx="2698700" cy="419100"/>
-          </a:xfrm>
-          <a:prstGeom prst="rect">
-            <a:avLst/>
-          </a:prstGeom>
-          <a:noFill/>
-        </p:spPr>
-        <p:txBody>
-          <a:bodyPr wrap="square" lIns="0" rIns="0" tIns="0" bIns="0" anchor="t">
-            <a:spAutoFit/>
-          </a:bodyPr>
-          <a:lstStyle/>
-          <a:p>
-            <a:pPr algn="l">
-              <a:lnSpc>
-                <a:spcPts val="3000"/>
-              </a:lnSpc>
-            </a:pPr>
-            <a:r>
-              <a:rPr sz="3000" b="1">
-                <a:solidFill>
-                  <a:srgbClr val="C2703D"/>
-                </a:solidFill>
-                <a:latin typeface="Noto Serif TC"/>
-                <a:ea typeface="Noto Serif TC"/>
-              </a:rPr>
-              <a:t>02</a:t>
-            </a:r>
-          </a:p>
-        </p:txBody>
-      </p:sp>
-      <p:sp>
-        <p:nvSpPr>
-          <p:cNvPr id="12" name="TextBox 11"/>
-          <p:cNvSpPr txBox="1"/>
-          <p:nvPr/>
-        </p:nvSpPr>
-        <p:spPr>
-          <a:xfrm>
-            <a:off x="4775150" y="3496716"/>
-            <a:ext cx="2698700" cy="342900"/>
-          </a:xfrm>
-          <a:prstGeom prst="rect">
-            <a:avLst/>
-          </a:prstGeom>
-          <a:noFill/>
-        </p:spPr>
-        <p:txBody>
-          <a:bodyPr wrap="square" lIns="0" rIns="0" tIns="0" bIns="0" anchor="t">
-            <a:spAutoFit/>
-          </a:bodyPr>
-          <a:lstStyle/>
-          <a:p>
-            <a:pPr algn="l">
-              <a:lnSpc>
-                <a:spcPts val="2400"/>
-              </a:lnSpc>
-            </a:pPr>
-            <a:r>
-              <a:rPr sz="1650" b="0">
-                <a:solidFill>
-                  <a:srgbClr val="1E2F4D"/>
-                </a:solidFill>
-                <a:latin typeface="Noto Sans TC"/>
-                <a:ea typeface="Noto Sans TC"/>
-              </a:rPr>
-              <a:t>收斂</a:t>
-            </a:r>
-          </a:p>
-        </p:txBody>
-      </p:sp>
-      <p:sp>
-        <p:nvSpPr>
-          <p:cNvPr id="13" name="TextBox 12"/>
-          <p:cNvSpPr txBox="1"/>
-          <p:nvPr/>
-        </p:nvSpPr>
-        <p:spPr>
-          <a:xfrm>
-            <a:off x="4775150" y="3858666"/>
-            <a:ext cx="2698700" cy="750391"/>
-          </a:xfrm>
-          <a:prstGeom prst="rect">
-            <a:avLst/>
-          </a:prstGeom>
-          <a:noFill/>
-        </p:spPr>
-        <p:txBody>
-          <a:bodyPr wrap="square" lIns="0" rIns="0" tIns="0" bIns="0" anchor="t">
-            <a:spAutoFit/>
-          </a:bodyPr>
-          <a:lstStyle/>
-          <a:p>
-            <a:pPr algn="l">
-              <a:lnSpc>
-                <a:spcPts val="2804"/>
-              </a:lnSpc>
-            </a:pPr>
-            <a:r>
-              <a:rPr sz="1650" b="0">
-                <a:solidFill>
-                  <a:srgbClr val="1E2230"/>
-                </a:solidFill>
-                <a:latin typeface="Noto Sans TC"/>
-                <a:ea typeface="Noto Sans TC"/>
-              </a:rPr>
-              <a:t>八週，停兩條，資源集中到一條。</a:t>
-            </a:r>
-          </a:p>
-        </p:txBody>
-      </p:sp>
-      <p:sp>
-        <p:nvSpPr>
-          <p:cNvPr id="14" name="TextBox 13"/>
-          <p:cNvSpPr txBox="1"/>
-          <p:nvPr/>
-        </p:nvSpPr>
-        <p:spPr>
-          <a:xfrm>
-            <a:off x="8407300" y="2982366"/>
-            <a:ext cx="2698849" cy="419100"/>
-          </a:xfrm>
-          <a:prstGeom prst="rect">
-            <a:avLst/>
-          </a:prstGeom>
-          <a:noFill/>
-        </p:spPr>
-        <p:txBody>
-          <a:bodyPr wrap="square" lIns="0" rIns="0" tIns="0" bIns="0" anchor="t">
-            <a:spAutoFit/>
-          </a:bodyPr>
-          <a:lstStyle/>
-          <a:p>
-            <a:pPr algn="l">
-              <a:lnSpc>
-                <a:spcPts val="3000"/>
-              </a:lnSpc>
-            </a:pPr>
-            <a:r>
-              <a:rPr sz="3000" b="1">
-                <a:solidFill>
-                  <a:srgbClr val="C2703D"/>
-                </a:solidFill>
-                <a:latin typeface="Noto Serif TC"/>
-                <a:ea typeface="Noto Serif TC"/>
-              </a:rPr>
-              <a:t>03</a:t>
-            </a:r>
-          </a:p>
-        </p:txBody>
-      </p:sp>
-      <p:sp>
-        <p:nvSpPr>
-          <p:cNvPr id="15" name="TextBox 14"/>
-          <p:cNvSpPr txBox="1"/>
-          <p:nvPr/>
-        </p:nvSpPr>
-        <p:spPr>
-          <a:xfrm>
-            <a:off x="8407300" y="3496716"/>
-            <a:ext cx="2698849" cy="342900"/>
-          </a:xfrm>
-          <a:prstGeom prst="rect">
-            <a:avLst/>
-          </a:prstGeom>
-          <a:noFill/>
-        </p:spPr>
-        <p:txBody>
-          <a:bodyPr wrap="square" lIns="0" rIns="0" tIns="0" bIns="0" anchor="t">
-            <a:spAutoFit/>
-          </a:bodyPr>
-          <a:lstStyle/>
-          <a:p>
-            <a:pPr algn="l">
-              <a:lnSpc>
-                <a:spcPts val="2400"/>
-              </a:lnSpc>
-            </a:pPr>
-            <a:r>
-              <a:rPr sz="1650" b="0">
-                <a:solidFill>
-                  <a:srgbClr val="1E2F4D"/>
-                </a:solidFill>
-                <a:latin typeface="Noto Sans TC"/>
-                <a:ea typeface="Noto Sans TC"/>
-              </a:rPr>
-              <a:t>放大</a:t>
-            </a:r>
-          </a:p>
-        </p:txBody>
-      </p:sp>
-      <p:sp>
-        <p:nvSpPr>
-          <p:cNvPr id="16" name="TextBox 15"/>
-          <p:cNvSpPr txBox="1"/>
-          <p:nvPr/>
-        </p:nvSpPr>
-        <p:spPr>
-          <a:xfrm>
-            <a:off x="8407300" y="3858666"/>
-            <a:ext cx="2698849" cy="750391"/>
-          </a:xfrm>
-          <a:prstGeom prst="rect">
-            <a:avLst/>
-          </a:prstGeom>
-          <a:noFill/>
-        </p:spPr>
-        <p:txBody>
-          <a:bodyPr wrap="square" lIns="0" rIns="0" tIns="0" bIns="0" anchor="t">
-            <a:spAutoFit/>
-          </a:bodyPr>
-          <a:lstStyle/>
-          <a:p>
-            <a:pPr algn="l">
-              <a:lnSpc>
-                <a:spcPts val="2804"/>
-              </a:lnSpc>
-            </a:pPr>
-            <a:r>
-              <a:rPr sz="1650" b="0">
-                <a:solidFill>
-                  <a:srgbClr val="1E2230"/>
-                </a:solidFill>
-                <a:latin typeface="Noto Sans TC"/>
-                <a:ea typeface="Noto Sans TC"/>
-              </a:rPr>
-              <a:t>下半年，把一條做到市佔第一。</a:t>
-            </a:r>
-          </a:p>
-        </p:txBody>
-      </p:sp>
-      <p:sp>
-        <p:nvSpPr>
-          <p:cNvPr id="17" name="TextBox 16"/>
+              <a:t>行動</a:t>
+            </a:r>
+          </a:p>
+        </p:txBody>
+      </p:sp>
+      <p:sp>
+        <p:nvSpPr>
+          <p:cNvPr id="7" name="TextBox 6"/>
           <p:cNvSpPr txBox="1"/>
           <p:nvPr/>
         </p:nvSpPr>
@@ -7901,7 +7984,7 @@
             <a:r>
               <a:rPr sz="1050" b="0">
                 <a:solidFill>
-                  <a:srgbClr val="1E2F4D"/>
+                  <a:srgbClr val="F4F1EA"/>
                 </a:solidFill>
                 <a:latin typeface="Noto Sans TC"/>
                 <a:ea typeface="Noto Sans TC"/>
@@ -7955,7 +8038,173 @@
       </p:pic>
       <p:sp>
         <p:nvSpPr>
-          <p:cNvPr id="3" name="TextBox 2"/>
+          <p:cNvPr id="3" name="Rectangle 2"/>
+          <p:cNvSpPr/>
+          <p:nvPr/>
+        </p:nvSpPr>
+        <p:spPr>
+          <a:xfrm>
+            <a:off x="838200" y="2744241"/>
+            <a:ext cx="3251150" cy="2093416"/>
+          </a:xfrm>
+          <a:prstGeom prst="rect">
+            <a:avLst/>
+          </a:prstGeom>
+          <a:noFill/>
+          <a:ln w="9525">
+            <a:solidFill>
+              <a:srgbClr val="C2703D"/>
+            </a:solidFill>
+          </a:ln>
+          <a:effectLst/>
+        </p:spPr>
+        <p:style>
+          <a:lnRef idx="1">
+            <a:schemeClr val="accent1"/>
+          </a:lnRef>
+          <a:fillRef idx="3">
+            <a:schemeClr val="accent1"/>
+          </a:fillRef>
+          <a:effectRef idx="2">
+            <a:schemeClr val="accent1"/>
+          </a:effectRef>
+          <a:fontRef idx="minor">
+            <a:schemeClr val="lt1"/>
+          </a:fontRef>
+        </p:style>
+        <p:txBody>
+          <a:bodyPr rtlCol="0" anchor="ctr"/>
+          <a:lstStyle/>
+          <a:p/>
+        </p:txBody>
+      </p:sp>
+      <p:sp>
+        <p:nvSpPr>
+          <p:cNvPr id="4" name="Rectangle 3"/>
+          <p:cNvSpPr/>
+          <p:nvPr/>
+        </p:nvSpPr>
+        <p:spPr>
+          <a:xfrm>
+            <a:off x="4470350" y="2744241"/>
+            <a:ext cx="3251150" cy="2093416"/>
+          </a:xfrm>
+          <a:prstGeom prst="rect">
+            <a:avLst/>
+          </a:prstGeom>
+          <a:noFill/>
+          <a:ln w="9525">
+            <a:solidFill>
+              <a:srgbClr val="C2703D"/>
+            </a:solidFill>
+          </a:ln>
+          <a:effectLst/>
+        </p:spPr>
+        <p:style>
+          <a:lnRef idx="1">
+            <a:schemeClr val="accent1"/>
+          </a:lnRef>
+          <a:fillRef idx="3">
+            <a:schemeClr val="accent1"/>
+          </a:fillRef>
+          <a:effectRef idx="2">
+            <a:schemeClr val="accent1"/>
+          </a:effectRef>
+          <a:fontRef idx="minor">
+            <a:schemeClr val="lt1"/>
+          </a:fontRef>
+        </p:style>
+        <p:txBody>
+          <a:bodyPr rtlCol="0" anchor="ctr"/>
+          <a:lstStyle/>
+          <a:p/>
+        </p:txBody>
+      </p:sp>
+      <p:sp>
+        <p:nvSpPr>
+          <p:cNvPr id="5" name="Rectangle 4"/>
+          <p:cNvSpPr/>
+          <p:nvPr/>
+        </p:nvSpPr>
+        <p:spPr>
+          <a:xfrm>
+            <a:off x="8102500" y="2744241"/>
+            <a:ext cx="3251299" cy="2093416"/>
+          </a:xfrm>
+          <a:prstGeom prst="rect">
+            <a:avLst/>
+          </a:prstGeom>
+          <a:noFill/>
+          <a:ln w="9525">
+            <a:solidFill>
+              <a:srgbClr val="C2703D"/>
+            </a:solidFill>
+          </a:ln>
+          <a:effectLst/>
+        </p:spPr>
+        <p:style>
+          <a:lnRef idx="1">
+            <a:schemeClr val="accent1"/>
+          </a:lnRef>
+          <a:fillRef idx="3">
+            <a:schemeClr val="accent1"/>
+          </a:fillRef>
+          <a:effectRef idx="2">
+            <a:schemeClr val="accent1"/>
+          </a:effectRef>
+          <a:fontRef idx="minor">
+            <a:schemeClr val="lt1"/>
+          </a:fontRef>
+        </p:style>
+        <p:txBody>
+          <a:bodyPr rtlCol="0" anchor="ctr"/>
+          <a:lstStyle/>
+          <a:p/>
+        </p:txBody>
+      </p:sp>
+      <p:sp>
+        <p:nvSpPr>
+          <p:cNvPr id="6" name="TextBox 5"/>
+          <p:cNvSpPr txBox="1"/>
+          <p:nvPr/>
+        </p:nvSpPr>
+        <p:spPr>
+          <a:xfrm>
+            <a:off x="838200" y="457200"/>
+            <a:ext cx="1625947" cy="200025"/>
+          </a:xfrm>
+          <a:prstGeom prst="rect">
+            <a:avLst/>
+          </a:prstGeom>
+          <a:noFill/>
+        </p:spPr>
+        <p:txBody>
+          <a:bodyPr wrap="square" lIns="0" rIns="0" tIns="0" bIns="0" anchor="t">
+            <a:spAutoFit/>
+          </a:bodyPr>
+          <a:lstStyle/>
+          <a:p>
+            <a:pPr algn="l">
+              <a:lnSpc>
+                <a:spcPts val="1275"/>
+              </a:lnSpc>
+            </a:pPr>
+            <a:r>
+              <a:rPr sz="900" b="0" spc="270">
+                <a:solidFill>
+                  <a:srgbClr val="1E2F4D"/>
+                </a:solidFill>
+                <a:latin typeface="Noto Sans TC"/>
+                <a:ea typeface="Noto Sans TC"/>
+              </a:rPr>
+              <a:t>POLARIS ADVISORY</a:t>
+            </a:r>
+          </a:p>
+        </p:txBody>
+      </p:sp>
+      <p:sp>
+        <p:nvSpPr>
+          <p:cNvPr id="7" name="TextBox 6"/>
           <p:cNvSpPr txBox="1"/>
           <p:nvPr/>
         </p:nvSpPr>
@@ -7995,13 +8244,13 @@
       </p:sp>
       <p:sp>
         <p:nvSpPr>
-          <p:cNvPr id="4" name="TextBox 3"/>
-          <p:cNvSpPr txBox="1"/>
-          <p:nvPr/>
-        </p:nvSpPr>
-        <p:spPr>
-          <a:xfrm>
-            <a:off x="838200" y="2850802"/>
+          <p:cNvPr id="8" name="TextBox 7"/>
+          <p:cNvSpPr txBox="1"/>
+          <p:nvPr/>
+        </p:nvSpPr>
+        <p:spPr>
+          <a:xfrm>
+            <a:off x="838200" y="838200"/>
             <a:ext cx="10572750" cy="533400"/>
           </a:xfrm>
           <a:prstGeom prst="rect">
@@ -8028,36 +8277,76 @@
                 <a:latin typeface="Noto Serif TC"/>
                 <a:ea typeface="Noto Serif TC"/>
               </a:rPr>
-              <a:t>先看數字，再談方向。</a:t>
-            </a:r>
-          </a:p>
-        </p:txBody>
-      </p:sp>
-      <p:sp>
-        <p:nvSpPr>
-          <p:cNvPr id="5" name="TextBox 4"/>
-          <p:cNvSpPr txBox="1"/>
-          <p:nvPr/>
-        </p:nvSpPr>
-        <p:spPr>
-          <a:xfrm>
-            <a:off x="838200" y="3650902"/>
-            <a:ext cx="10572750" cy="394245"/>
-          </a:xfrm>
-          <a:prstGeom prst="rect">
-            <a:avLst/>
-          </a:prstGeom>
-          <a:noFill/>
-        </p:spPr>
-        <p:txBody>
-          <a:bodyPr wrap="square" lIns="0" rIns="0" tIns="0" bIns="0" anchor="t">
-            <a:spAutoFit/>
-          </a:bodyPr>
-          <a:lstStyle/>
-          <a:p>
-            <a:pPr algn="l">
-              <a:lnSpc>
-                <a:spcPts val="2804"/>
+              <a:t>三步開始</a:t>
+            </a:r>
+          </a:p>
+        </p:txBody>
+      </p:sp>
+      <p:sp>
+        <p:nvSpPr>
+          <p:cNvPr id="9" name="TextBox 8"/>
+          <p:cNvSpPr txBox="1"/>
+          <p:nvPr/>
+        </p:nvSpPr>
+        <p:spPr>
+          <a:xfrm>
+            <a:off x="1143000" y="2982366"/>
+            <a:ext cx="2698700" cy="419100"/>
+          </a:xfrm>
+          <a:prstGeom prst="rect">
+            <a:avLst/>
+          </a:prstGeom>
+          <a:noFill/>
+        </p:spPr>
+        <p:txBody>
+          <a:bodyPr wrap="square" lIns="0" rIns="0" tIns="0" bIns="0" anchor="t">
+            <a:spAutoFit/>
+          </a:bodyPr>
+          <a:lstStyle/>
+          <a:p>
+            <a:pPr algn="l">
+              <a:lnSpc>
+                <a:spcPts val="3000"/>
+              </a:lnSpc>
+            </a:pPr>
+            <a:r>
+              <a:rPr sz="3000" b="1">
+                <a:solidFill>
+                  <a:srgbClr val="C2703D"/>
+                </a:solidFill>
+                <a:latin typeface="Noto Serif TC"/>
+                <a:ea typeface="Noto Serif TC"/>
+              </a:rPr>
+              <a:t>01</a:t>
+            </a:r>
+          </a:p>
+        </p:txBody>
+      </p:sp>
+      <p:sp>
+        <p:nvSpPr>
+          <p:cNvPr id="10" name="TextBox 9"/>
+          <p:cNvSpPr txBox="1"/>
+          <p:nvPr/>
+        </p:nvSpPr>
+        <p:spPr>
+          <a:xfrm>
+            <a:off x="1143000" y="3496716"/>
+            <a:ext cx="2698700" cy="342900"/>
+          </a:xfrm>
+          <a:prstGeom prst="rect">
+            <a:avLst/>
+          </a:prstGeom>
+          <a:noFill/>
+        </p:spPr>
+        <p:txBody>
+          <a:bodyPr wrap="square" lIns="0" rIns="0" tIns="0" bIns="0" anchor="t">
+            <a:spAutoFit/>
+          </a:bodyPr>
+          <a:lstStyle/>
+          <a:p>
+            <a:pPr algn="l">
+              <a:lnSpc>
+                <a:spcPts val="2400"/>
               </a:lnSpc>
             </a:pPr>
             <a:r>
@@ -8068,14 +8357,294 @@
                 <a:latin typeface="Noto Sans TC"/>
                 <a:ea typeface="Noto Sans TC"/>
               </a:rPr>
-              <a:t>hello@polaris.example（示意，換成你的）</a:t>
-            </a:r>
-          </a:p>
-        </p:txBody>
-      </p:sp>
-      <p:sp>
-        <p:nvSpPr>
-          <p:cNvPr id="6" name="TextBox 5"/>
+              <a:t>盤點</a:t>
+            </a:r>
+          </a:p>
+        </p:txBody>
+      </p:sp>
+      <p:sp>
+        <p:nvSpPr>
+          <p:cNvPr id="11" name="TextBox 10"/>
+          <p:cNvSpPr txBox="1"/>
+          <p:nvPr/>
+        </p:nvSpPr>
+        <p:spPr>
+          <a:xfrm>
+            <a:off x="1143000" y="3858666"/>
+            <a:ext cx="2698700" cy="750391"/>
+          </a:xfrm>
+          <a:prstGeom prst="rect">
+            <a:avLst/>
+          </a:prstGeom>
+          <a:noFill/>
+        </p:spPr>
+        <p:txBody>
+          <a:bodyPr wrap="square" lIns="0" rIns="0" tIns="0" bIns="0" anchor="t">
+            <a:spAutoFit/>
+          </a:bodyPr>
+          <a:lstStyle/>
+          <a:p>
+            <a:pPr algn="l">
+              <a:lnSpc>
+                <a:spcPts val="2804"/>
+              </a:lnSpc>
+            </a:pPr>
+            <a:r>
+              <a:rPr sz="1650" b="0">
+                <a:solidFill>
+                  <a:srgbClr val="1E2230"/>
+                </a:solidFill>
+                <a:latin typeface="Noto Sans TC"/>
+                <a:ea typeface="Noto Sans TC"/>
+              </a:rPr>
+              <a:t>四週，盤三條產品線的毛利與流失。</a:t>
+            </a:r>
+          </a:p>
+        </p:txBody>
+      </p:sp>
+      <p:sp>
+        <p:nvSpPr>
+          <p:cNvPr id="12" name="TextBox 11"/>
+          <p:cNvSpPr txBox="1"/>
+          <p:nvPr/>
+        </p:nvSpPr>
+        <p:spPr>
+          <a:xfrm>
+            <a:off x="4775150" y="2982366"/>
+            <a:ext cx="2698700" cy="419100"/>
+          </a:xfrm>
+          <a:prstGeom prst="rect">
+            <a:avLst/>
+          </a:prstGeom>
+          <a:noFill/>
+        </p:spPr>
+        <p:txBody>
+          <a:bodyPr wrap="square" lIns="0" rIns="0" tIns="0" bIns="0" anchor="t">
+            <a:spAutoFit/>
+          </a:bodyPr>
+          <a:lstStyle/>
+          <a:p>
+            <a:pPr algn="l">
+              <a:lnSpc>
+                <a:spcPts val="3000"/>
+              </a:lnSpc>
+            </a:pPr>
+            <a:r>
+              <a:rPr sz="3000" b="1">
+                <a:solidFill>
+                  <a:srgbClr val="C2703D"/>
+                </a:solidFill>
+                <a:latin typeface="Noto Serif TC"/>
+                <a:ea typeface="Noto Serif TC"/>
+              </a:rPr>
+              <a:t>02</a:t>
+            </a:r>
+          </a:p>
+        </p:txBody>
+      </p:sp>
+      <p:sp>
+        <p:nvSpPr>
+          <p:cNvPr id="13" name="TextBox 12"/>
+          <p:cNvSpPr txBox="1"/>
+          <p:nvPr/>
+        </p:nvSpPr>
+        <p:spPr>
+          <a:xfrm>
+            <a:off x="4775150" y="3496716"/>
+            <a:ext cx="2698700" cy="342900"/>
+          </a:xfrm>
+          <a:prstGeom prst="rect">
+            <a:avLst/>
+          </a:prstGeom>
+          <a:noFill/>
+        </p:spPr>
+        <p:txBody>
+          <a:bodyPr wrap="square" lIns="0" rIns="0" tIns="0" bIns="0" anchor="t">
+            <a:spAutoFit/>
+          </a:bodyPr>
+          <a:lstStyle/>
+          <a:p>
+            <a:pPr algn="l">
+              <a:lnSpc>
+                <a:spcPts val="2400"/>
+              </a:lnSpc>
+            </a:pPr>
+            <a:r>
+              <a:rPr sz="1650" b="0">
+                <a:solidFill>
+                  <a:srgbClr val="1E2F4D"/>
+                </a:solidFill>
+                <a:latin typeface="Noto Sans TC"/>
+                <a:ea typeface="Noto Sans TC"/>
+              </a:rPr>
+              <a:t>收斂</a:t>
+            </a:r>
+          </a:p>
+        </p:txBody>
+      </p:sp>
+      <p:sp>
+        <p:nvSpPr>
+          <p:cNvPr id="14" name="TextBox 13"/>
+          <p:cNvSpPr txBox="1"/>
+          <p:nvPr/>
+        </p:nvSpPr>
+        <p:spPr>
+          <a:xfrm>
+            <a:off x="4775150" y="3858666"/>
+            <a:ext cx="2698700" cy="750391"/>
+          </a:xfrm>
+          <a:prstGeom prst="rect">
+            <a:avLst/>
+          </a:prstGeom>
+          <a:noFill/>
+        </p:spPr>
+        <p:txBody>
+          <a:bodyPr wrap="square" lIns="0" rIns="0" tIns="0" bIns="0" anchor="t">
+            <a:spAutoFit/>
+          </a:bodyPr>
+          <a:lstStyle/>
+          <a:p>
+            <a:pPr algn="l">
+              <a:lnSpc>
+                <a:spcPts val="2804"/>
+              </a:lnSpc>
+            </a:pPr>
+            <a:r>
+              <a:rPr sz="1650" b="0">
+                <a:solidFill>
+                  <a:srgbClr val="1E2230"/>
+                </a:solidFill>
+                <a:latin typeface="Noto Sans TC"/>
+                <a:ea typeface="Noto Sans TC"/>
+              </a:rPr>
+              <a:t>八週，停兩條，資源集中到一條。</a:t>
+            </a:r>
+          </a:p>
+        </p:txBody>
+      </p:sp>
+      <p:sp>
+        <p:nvSpPr>
+          <p:cNvPr id="15" name="TextBox 14"/>
+          <p:cNvSpPr txBox="1"/>
+          <p:nvPr/>
+        </p:nvSpPr>
+        <p:spPr>
+          <a:xfrm>
+            <a:off x="8407300" y="2982366"/>
+            <a:ext cx="2698849" cy="419100"/>
+          </a:xfrm>
+          <a:prstGeom prst="rect">
+            <a:avLst/>
+          </a:prstGeom>
+          <a:noFill/>
+        </p:spPr>
+        <p:txBody>
+          <a:bodyPr wrap="square" lIns="0" rIns="0" tIns="0" bIns="0" anchor="t">
+            <a:spAutoFit/>
+          </a:bodyPr>
+          <a:lstStyle/>
+          <a:p>
+            <a:pPr algn="l">
+              <a:lnSpc>
+                <a:spcPts val="3000"/>
+              </a:lnSpc>
+            </a:pPr>
+            <a:r>
+              <a:rPr sz="3000" b="1">
+                <a:solidFill>
+                  <a:srgbClr val="C2703D"/>
+                </a:solidFill>
+                <a:latin typeface="Noto Serif TC"/>
+                <a:ea typeface="Noto Serif TC"/>
+              </a:rPr>
+              <a:t>03</a:t>
+            </a:r>
+          </a:p>
+        </p:txBody>
+      </p:sp>
+      <p:sp>
+        <p:nvSpPr>
+          <p:cNvPr id="16" name="TextBox 15"/>
+          <p:cNvSpPr txBox="1"/>
+          <p:nvPr/>
+        </p:nvSpPr>
+        <p:spPr>
+          <a:xfrm>
+            <a:off x="8407300" y="3496716"/>
+            <a:ext cx="2698849" cy="342900"/>
+          </a:xfrm>
+          <a:prstGeom prst="rect">
+            <a:avLst/>
+          </a:prstGeom>
+          <a:noFill/>
+        </p:spPr>
+        <p:txBody>
+          <a:bodyPr wrap="square" lIns="0" rIns="0" tIns="0" bIns="0" anchor="t">
+            <a:spAutoFit/>
+          </a:bodyPr>
+          <a:lstStyle/>
+          <a:p>
+            <a:pPr algn="l">
+              <a:lnSpc>
+                <a:spcPts val="2400"/>
+              </a:lnSpc>
+            </a:pPr>
+            <a:r>
+              <a:rPr sz="1650" b="0">
+                <a:solidFill>
+                  <a:srgbClr val="1E2F4D"/>
+                </a:solidFill>
+                <a:latin typeface="Noto Sans TC"/>
+                <a:ea typeface="Noto Sans TC"/>
+              </a:rPr>
+              <a:t>放大</a:t>
+            </a:r>
+          </a:p>
+        </p:txBody>
+      </p:sp>
+      <p:sp>
+        <p:nvSpPr>
+          <p:cNvPr id="17" name="TextBox 16"/>
+          <p:cNvSpPr txBox="1"/>
+          <p:nvPr/>
+        </p:nvSpPr>
+        <p:spPr>
+          <a:xfrm>
+            <a:off x="8407300" y="3858666"/>
+            <a:ext cx="2698849" cy="750391"/>
+          </a:xfrm>
+          <a:prstGeom prst="rect">
+            <a:avLst/>
+          </a:prstGeom>
+          <a:noFill/>
+        </p:spPr>
+        <p:txBody>
+          <a:bodyPr wrap="square" lIns="0" rIns="0" tIns="0" bIns="0" anchor="t">
+            <a:spAutoFit/>
+          </a:bodyPr>
+          <a:lstStyle/>
+          <a:p>
+            <a:pPr algn="l">
+              <a:lnSpc>
+                <a:spcPts val="2804"/>
+              </a:lnSpc>
+            </a:pPr>
+            <a:r>
+              <a:rPr sz="1650" b="0">
+                <a:solidFill>
+                  <a:srgbClr val="1E2230"/>
+                </a:solidFill>
+                <a:latin typeface="Noto Sans TC"/>
+                <a:ea typeface="Noto Sans TC"/>
+              </a:rPr>
+              <a:t>下半年，把一條做到市佔第一。</a:t>
+            </a:r>
+          </a:p>
+        </p:txBody>
+      </p:sp>
+      <p:sp>
+        <p:nvSpPr>
+          <p:cNvPr id="18" name="TextBox 17"/>
           <p:cNvSpPr txBox="1"/>
           <p:nvPr/>
         </p:nvSpPr>
